--- a/docs/manual/열린카페-운영자매뉴얼.pptx
+++ b/docs/manual/열린카페-운영자매뉴얼.pptx
@@ -7240,7 +7240,7 @@
                 </a:solidFill>
                 <a:latin typeface="Consolas"/>
               </a:rPr>
-              <a:t>R=https://github.com/fasol/shine_kiosk/releases/latest/download</a:t>
+              <a:t>R=https://github.com/Danjjinbibbang/shine_kiosk/releases/latest/download</a:t>
             </a:r>
           </a:p>
           <a:p>
@@ -7986,7 +7986,7 @@
                 </a:solidFill>
                 <a:latin typeface="Malgun Gothic"/>
               </a:rPr>
-              <a:t>•  5. curl -L -o ~/kiosk/kiosk-server.jar https://github.com/fasol/shine_kiosk/releases/latest/download/kiosk-server.jar</a:t>
+              <a:t>•  5. curl -L -o ~/kiosk/kiosk-server.jar https://github.com/Danjjinbibbang/shine_kiosk/releases/latest/download/kiosk-server.jar</a:t>
             </a:r>
           </a:p>
           <a:p>

--- a/docs/manual/열린카페-운영자매뉴얼.pptx
+++ b/docs/manual/열린카페-운영자매뉴얼.pptx
@@ -3519,7 +3519,7 @@
                 </a:solidFill>
                 <a:latin typeface="Malgun Gothic"/>
               </a:rPr>
-              <a:t>•  cash_given = 손님이 낸 현금. 거스름돈 = cash_given − cash_amount − change_credited(쿠폰에 넣은 잔돈) − change_paid(완료 때 준 거스름돈)</a:t>
+              <a:t>•  cash_given = 손님이 낸 현금. 남은 거스름돈(changeDue) = cash_given − cash_amount − change_credited(쿠폰에 넣은 잔돈) − change_paid(옛 주문에서 현금으로 준 것)</a:t>
             </a:r>
           </a:p>
           <a:p>
@@ -3551,7 +3551,7 @@
                 </a:solidFill>
                 <a:latin typeface="Malgun Gothic"/>
               </a:rPr>
-              <a:t>•  완료 시 change_paid += 남은 거스름돈 (확정). 되돌려 고치면 그 뒤 차액만</a:t>
+              <a:t>•  거스름돈은 늘 쿠폰으로: 쿠폰 주문은 생성·수정·완료 때 남은 거스름돈을 그 쿠폰에 자동 CHARGE. 아니면 change-to-coupon / change-to-new-coupon. changeDue &gt; 0 이면 완료 거부</a:t>
             </a:r>
           </a:p>
           <a:p>
@@ -3770,7 +3770,7 @@
         </p:nvGraphicFramePr>
         <p:xfrm>
           <a:off x="457200" y="1097280"/>
-          <a:ext cx="11277294" cy="3145536"/>
+          <a:ext cx="11277294" cy="2816352"/>
         </p:xfrm>
         <a:graphic>
           <a:graphicData uri="http://schemas.openxmlformats.org/drawingml/2006/table">
@@ -3782,7 +3782,7 @@
                 <a:gridCol w="4833126"/>
                 <a:gridCol w="6444168"/>
               </a:tblGrid>
-              <a:tr h="349504">
+              <a:tr h="352044">
                 <a:tc>
                   <a:txBody>
                     <a:bodyPr wrap="square"/>
@@ -3828,7 +3828,7 @@
                   </a:tcPr>
                 </a:tc>
               </a:tr>
-              <a:tr h="349504">
+              <a:tr h="352044">
                 <a:tc>
                   <a:txBody>
                     <a:bodyPr wrap="square"/>
@@ -3874,7 +3874,7 @@
                   </a:tcPr>
                 </a:tc>
               </a:tr>
-              <a:tr h="349504">
+              <a:tr h="352044">
                 <a:tc>
                   <a:txBody>
                     <a:bodyPr wrap="square"/>
@@ -3887,7 +3887,7 @@
                           </a:solidFill>
                           <a:latin typeface="Malgun Gothic"/>
                         </a:rPr>
-                        <a:t>GET /api/places</a:t>
+                        <a:t>GET /api/customers/regulars</a:t>
                       </a:r>
                     </a:p>
                   </a:txBody>
@@ -3909,7 +3909,7 @@
                           </a:solidFill>
                           <a:latin typeface="Malgun Gothic"/>
                         </a:rPr>
-                        <a:t>표시중 배달 장소 (층별)</a:t>
+                        <a:t>단골 이름 (가나다순)</a:t>
                       </a:r>
                     </a:p>
                   </a:txBody>
@@ -3920,7 +3920,7 @@
                   </a:tcPr>
                 </a:tc>
               </a:tr>
-              <a:tr h="349504">
+              <a:tr h="352044">
                 <a:tc>
                   <a:txBody>
                     <a:bodyPr wrap="square"/>
@@ -3933,7 +3933,7 @@
                           </a:solidFill>
                           <a:latin typeface="Malgun Gothic"/>
                         </a:rPr>
-                        <a:t>GET /api/customers/regulars</a:t>
+                        <a:t>POST /api/coupons/lookup {name, phoneLast4?}</a:t>
                       </a:r>
                     </a:p>
                   </a:txBody>
@@ -3955,7 +3955,7 @@
                           </a:solidFill>
                           <a:latin typeface="Malgun Gothic"/>
                         </a:rPr>
-                        <a:t>단골 이름 (가나다순)</a:t>
+                        <a:t>FOUND / NOT_FOUND / NEED_PHONE(candidates: id·뒤4자리). 전체 번호는 내려주지 않음</a:t>
                       </a:r>
                     </a:p>
                   </a:txBody>
@@ -3966,7 +3966,7 @@
                   </a:tcPr>
                 </a:tc>
               </a:tr>
-              <a:tr h="349504">
+              <a:tr h="352044">
                 <a:tc>
                   <a:txBody>
                     <a:bodyPr wrap="square"/>
@@ -3979,7 +3979,7 @@
                           </a:solidFill>
                           <a:latin typeface="Malgun Gothic"/>
                         </a:rPr>
-                        <a:t>POST /api/coupons/lookup {name, phoneLast4?}</a:t>
+                        <a:t>POST /api/orders/coupon-preview</a:t>
                       </a:r>
                     </a:p>
                   </a:txBody>
@@ -4001,7 +4001,7 @@
                           </a:solidFill>
                           <a:latin typeface="Malgun Gothic"/>
                         </a:rPr>
-                        <a:t>FOUND / NOT_FOUND / NEED_PHONE(candidates: id·뒤4자리). 전체 번호는 내려주지 않음</a:t>
+                        <a:t>쿠폰 적용 미리보기 (무료 1잔, 차감, 나머지)</a:t>
                       </a:r>
                     </a:p>
                   </a:txBody>
@@ -4012,7 +4012,7 @@
                   </a:tcPr>
                 </a:tc>
               </a:tr>
-              <a:tr h="349504">
+              <a:tr h="352044">
                 <a:tc>
                   <a:txBody>
                     <a:bodyPr wrap="square"/>
@@ -4025,7 +4025,7 @@
                           </a:solidFill>
                           <a:latin typeface="Malgun Gothic"/>
                         </a:rPr>
-                        <a:t>POST /api/orders/coupon-preview</a:t>
+                        <a:t>POST /api/orders</a:t>
                       </a:r>
                     </a:p>
                   </a:txBody>
@@ -4047,7 +4047,7 @@
                           </a:solidFill>
                           <a:latin typeface="Malgun Gothic"/>
                         </a:rPr>
-                        <a:t>쿠폰 적용 미리보기 (무료 1잔, 차감, 나머지)</a:t>
+                        <a:t>주문 생성 (받는 방법 없음). lines[{variantId, quantity, optionIds, staffFreeQty}], payMethod, couponId, useFreeDrink, remainderMethod, cashGiven, memo, clientRequestId</a:t>
                       </a:r>
                     </a:p>
                   </a:txBody>
@@ -4058,7 +4058,7 @@
                   </a:tcPr>
                 </a:tc>
               </a:tr>
-              <a:tr h="349504">
+              <a:tr h="352044">
                 <a:tc>
                   <a:txBody>
                     <a:bodyPr wrap="square"/>
@@ -4071,7 +4071,7 @@
                           </a:solidFill>
                           <a:latin typeface="Malgun Gothic"/>
                         </a:rPr>
-                        <a:t>POST /api/orders</a:t>
+                        <a:t>GET /api/orders/payment-info</a:t>
                       </a:r>
                     </a:p>
                   </a:txBody>
@@ -4093,7 +4093,7 @@
                           </a:solidFill>
                           <a:latin typeface="Malgun Gothic"/>
                         </a:rPr>
-                        <a:t>주문 생성. lines[{variantId, quantity, optionIds, staffFreeQty}], payMethod, couponId, useFreeDrink, remainderMethod, cashGiven, memo, clientRequestId</a:t>
+                        <a:t>계좌 안내 문구</a:t>
                       </a:r>
                     </a:p>
                   </a:txBody>
@@ -4104,7 +4104,7 @@
                   </a:tcPr>
                 </a:tc>
               </a:tr>
-              <a:tr h="349504">
+              <a:tr h="352044">
                 <a:tc>
                   <a:txBody>
                     <a:bodyPr wrap="square"/>
@@ -4117,7 +4117,7 @@
                           </a:solidFill>
                           <a:latin typeface="Malgun Gothic"/>
                         </a:rPr>
-                        <a:t>GET /api/orders/payment-info</a:t>
+                        <a:t>WS /ws</a:t>
                       </a:r>
                     </a:p>
                   </a:txBody>
@@ -4139,59 +4139,13 @@
                           </a:solidFill>
                           <a:latin typeface="Malgun Gothic"/>
                         </a:rPr>
-                        <a:t>계좌 안내 문구</a:t>
+                        <a:t>ORDERS_CHANGED 알림</a:t>
                       </a:r>
                     </a:p>
                   </a:txBody>
                   <a:tcPr marL="54864" marR="54864" marT="27432" marB="27432">
                     <a:solidFill>
                       <a:srgbClr val="FFFFFF"/>
-                    </a:solidFill>
-                  </a:tcPr>
-                </a:tc>
-              </a:tr>
-              <a:tr h="349504">
-                <a:tc>
-                  <a:txBody>
-                    <a:bodyPr wrap="square"/>
-                    <a:lstStyle/>
-                    <a:p>
-                      <a:r>
-                        <a:rPr sz="1200" b="0">
-                          <a:solidFill>
-                            <a:srgbClr val="2B221C"/>
-                          </a:solidFill>
-                          <a:latin typeface="Malgun Gothic"/>
-                        </a:rPr>
-                        <a:t>WS /ws</a:t>
-                      </a:r>
-                    </a:p>
-                  </a:txBody>
-                  <a:tcPr marL="54864" marR="54864" marT="27432" marB="27432">
-                    <a:solidFill>
-                      <a:srgbClr val="FAF6F0"/>
-                    </a:solidFill>
-                  </a:tcPr>
-                </a:tc>
-                <a:tc>
-                  <a:txBody>
-                    <a:bodyPr wrap="square"/>
-                    <a:lstStyle/>
-                    <a:p>
-                      <a:r>
-                        <a:rPr sz="1200" b="0">
-                          <a:solidFill>
-                            <a:srgbClr val="2B221C"/>
-                          </a:solidFill>
-                          <a:latin typeface="Malgun Gothic"/>
-                        </a:rPr>
-                        <a:t>ORDERS_CHANGED 알림</a:t>
-                      </a:r>
-                    </a:p>
-                  </a:txBody>
-                  <a:tcPr marL="54864" marR="54864" marT="27432" marB="27432">
-                    <a:solidFill>
-                      <a:srgbClr val="FAF6F0"/>
                     </a:solidFill>
                   </a:tcPr>
                 </a:tc>
@@ -4350,7 +4304,7 @@
         </p:nvGraphicFramePr>
         <p:xfrm>
           <a:off x="457200" y="1097280"/>
-          <a:ext cx="11277294" cy="3474720"/>
+          <a:ext cx="11277294" cy="3803904"/>
         </p:xfrm>
         <a:graphic>
           <a:graphicData uri="http://schemas.openxmlformats.org/drawingml/2006/table">
@@ -4362,7 +4316,7 @@
                 <a:gridCol w="5477543"/>
                 <a:gridCol w="5799751"/>
               </a:tblGrid>
-              <a:tr h="347472">
+              <a:tr h="345809">
                 <a:tc>
                   <a:txBody>
                     <a:bodyPr wrap="square"/>
@@ -4408,7 +4362,7 @@
                   </a:tcPr>
                 </a:tc>
               </a:tr>
-              <a:tr h="347472">
+              <a:tr h="345809">
                 <a:tc>
                   <a:txBody>
                     <a:bodyPr wrap="square"/>
@@ -4454,7 +4408,7 @@
                   </a:tcPr>
                 </a:tc>
               </a:tr>
-              <a:tr h="347472">
+              <a:tr h="345809">
                 <a:tc>
                   <a:txBody>
                     <a:bodyPr wrap="square"/>
@@ -4500,7 +4454,7 @@
                   </a:tcPr>
                 </a:tc>
               </a:tr>
-              <a:tr h="347472">
+              <a:tr h="345809">
                 <a:tc>
                   <a:txBody>
                     <a:bodyPr wrap="square"/>
@@ -4535,7 +4489,7 @@
                           </a:solidFill>
                           <a:latin typeface="Malgun Gothic"/>
                         </a:rPr>
-                        <a:t>수정 (이름·받는 곳·줄·메모). 결제 수단 불변</a:t>
+                        <a:t>수정 (이름·줄·메모). 결제 수단 불변</a:t>
                       </a:r>
                     </a:p>
                   </a:txBody>
@@ -4546,7 +4500,7 @@
                   </a:tcPr>
                 </a:tc>
               </a:tr>
-              <a:tr h="347472">
+              <a:tr h="345809">
                 <a:tc>
                   <a:txBody>
                     <a:bodyPr wrap="square"/>
@@ -4581,7 +4535,7 @@
                           </a:solidFill>
                           <a:latin typeface="Malgun Gothic"/>
                         </a:rPr>
-                        <a:t>완료(거스름돈 확정) · 되돌리기 · 취소(환불 수단)</a:t>
+                        <a:t>완료(거스름돈이 남으면 거부) · 되돌리기 · 취소(환불 수단)</a:t>
                       </a:r>
                     </a:p>
                   </a:txBody>
@@ -4592,7 +4546,7 @@
                   </a:tcPr>
                 </a:tc>
               </a:tr>
-              <a:tr h="347472">
+              <a:tr h="345809">
                 <a:tc>
                   <a:txBody>
                     <a:bodyPr wrap="square"/>
@@ -4638,7 +4592,7 @@
                   </a:tcPr>
                 </a:tc>
               </a:tr>
-              <a:tr h="347472">
+              <a:tr h="345809">
                 <a:tc>
                   <a:txBody>
                     <a:bodyPr wrap="square"/>
@@ -4673,7 +4627,7 @@
                           </a:solidFill>
                           <a:latin typeface="Malgun Gothic"/>
                         </a:rPr>
-                        <a:t>거스름돈을 쿠폰에 충전</a:t>
+                        <a:t>거스름돈을 쿠폰에 충전 (무료잔은 거스름돈 금액 기준)</a:t>
                       </a:r>
                     </a:p>
                   </a:txBody>
@@ -4684,7 +4638,7 @@
                   </a:tcPr>
                 </a:tc>
               </a:tr>
-              <a:tr h="347472">
+              <a:tr h="345809">
                 <a:tc>
                   <a:txBody>
                     <a:bodyPr wrap="square"/>
@@ -4697,12 +4651,104 @@
                           </a:solidFill>
                           <a:latin typeface="Malgun Gothic"/>
                         </a:rPr>
+                        <a:t>POST …/{id}/change-to-new-coupon {name, phone}</a:t>
+                      </a:r>
+                    </a:p>
+                  </a:txBody>
+                  <a:tcPr marL="54864" marR="54864" marT="27432" marB="27432">
+                    <a:solidFill>
+                      <a:srgbClr val="FFFFFF"/>
+                    </a:solidFill>
+                  </a:tcPr>
+                </a:tc>
+                <a:tc>
+                  <a:txBody>
+                    <a:bodyPr wrap="square"/>
+                    <a:lstStyle/>
+                    <a:p>
+                      <a:r>
+                        <a:rPr sz="1100" b="0">
+                          <a:solidFill>
+                            <a:srgbClr val="2B221C"/>
+                          </a:solidFill>
+                          <a:latin typeface="Malgun Gothic"/>
+                        </a:rPr>
+                        <a:t>쿠폰을 잔액 0 으로 만들고 거스름돈 충전. 만든 쿠폰을 돌려줌</a:t>
+                      </a:r>
+                    </a:p>
+                  </a:txBody>
+                  <a:tcPr marL="54864" marR="54864" marT="27432" marB="27432">
+                    <a:solidFill>
+                      <a:srgbClr val="FFFFFF"/>
+                    </a:solidFill>
+                  </a:tcPr>
+                </a:tc>
+              </a:tr>
+              <a:tr h="345809">
+                <a:tc>
+                  <a:txBody>
+                    <a:bodyPr wrap="square"/>
+                    <a:lstStyle/>
+                    <a:p>
+                      <a:r>
+                        <a:rPr sz="1100" b="0">
+                          <a:solidFill>
+                            <a:srgbClr val="2B221C"/>
+                          </a:solidFill>
+                          <a:latin typeface="Malgun Gothic"/>
+                        </a:rPr>
                         <a:t>/api/staff/coupons: POST(등록) · lookup · ?name= · GET {id} · {id}/history · PUT {id}/name · {id}/phone · POST {id}/charge · {id}/adjust · DELETE · GET preset</a:t>
                       </a:r>
                     </a:p>
                   </a:txBody>
                   <a:tcPr marL="54864" marR="54864" marT="27432" marB="27432">
                     <a:solidFill>
+                      <a:srgbClr val="FAF6F0"/>
+                    </a:solidFill>
+                  </a:tcPr>
+                </a:tc>
+                <a:tc>
+                  <a:txBody>
+                    <a:bodyPr wrap="square"/>
+                    <a:lstStyle/>
+                    <a:p>
+                      <a:r>
+                        <a:rPr sz="1100" b="0">
+                          <a:solidFill>
+                            <a:srgbClr val="2B221C"/>
+                          </a:solidFill>
+                          <a:latin typeface="Malgun Gothic"/>
+                        </a:rPr>
+                        <a:t>쿠폰 관리 전부</a:t>
+                      </a:r>
+                    </a:p>
+                  </a:txBody>
+                  <a:tcPr marL="54864" marR="54864" marT="27432" marB="27432">
+                    <a:solidFill>
+                      <a:srgbClr val="FAF6F0"/>
+                    </a:solidFill>
+                  </a:tcPr>
+                </a:tc>
+              </a:tr>
+              <a:tr h="345809">
+                <a:tc>
+                  <a:txBody>
+                    <a:bodyPr wrap="square"/>
+                    <a:lstStyle/>
+                    <a:p>
+                      <a:r>
+                        <a:rPr sz="1100" b="0">
+                          <a:solidFill>
+                            <a:srgbClr val="2B221C"/>
+                          </a:solidFill>
+                          <a:latin typeface="Malgun Gothic"/>
+                        </a:rPr>
+                        <a:t>/api/staff/menu (CRUD, {id}/available, PUT order) · /options · /api/staff/categories (CRUD, order)</a:t>
+                      </a:r>
+                    </a:p>
+                  </a:txBody>
+                  <a:tcPr marL="54864" marR="54864" marT="27432" marB="27432">
+                    <a:solidFill>
                       <a:srgbClr val="FFFFFF"/>
                     </a:solidFill>
                   </a:tcPr>
@@ -4719,7 +4765,7 @@
                           </a:solidFill>
                           <a:latin typeface="Malgun Gothic"/>
                         </a:rPr>
-                        <a:t>쿠폰 관리 전부</a:t>
+                        <a:t>설정</a:t>
                       </a:r>
                     </a:p>
                   </a:txBody>
@@ -4730,7 +4776,7 @@
                   </a:tcPr>
                 </a:tc>
               </a:tr>
-              <a:tr h="347472">
+              <a:tr h="345814">
                 <a:tc>
                   <a:txBody>
                     <a:bodyPr wrap="square"/>
@@ -4743,7 +4789,7 @@
                           </a:solidFill>
                           <a:latin typeface="Malgun Gothic"/>
                         </a:rPr>
-                        <a:t>/api/staff/menu (CRUD, {id}/available, PUT order) · /options · /api/staff/categories (CRUD, order) · /api/staff/places</a:t>
+                        <a:t>/api/staff/reports: days · orders?date · days.csv · orders.csv?date · backup.zip · backup.db</a:t>
                       </a:r>
                     </a:p>
                   </a:txBody>
@@ -4765,59 +4811,13 @@
                           </a:solidFill>
                           <a:latin typeface="Malgun Gothic"/>
                         </a:rPr>
-                        <a:t>설정</a:t>
+                        <a:t>매출 · CSV · 백업</a:t>
                       </a:r>
                     </a:p>
                   </a:txBody>
                   <a:tcPr marL="54864" marR="54864" marT="27432" marB="27432">
                     <a:solidFill>
                       <a:srgbClr val="FAF6F0"/>
-                    </a:solidFill>
-                  </a:tcPr>
-                </a:tc>
-              </a:tr>
-              <a:tr h="347472">
-                <a:tc>
-                  <a:txBody>
-                    <a:bodyPr wrap="square"/>
-                    <a:lstStyle/>
-                    <a:p>
-                      <a:r>
-                        <a:rPr sz="1100" b="0">
-                          <a:solidFill>
-                            <a:srgbClr val="2B221C"/>
-                          </a:solidFill>
-                          <a:latin typeface="Malgun Gothic"/>
-                        </a:rPr>
-                        <a:t>/api/staff/reports: days · orders?date · days.csv · orders.csv?date · backup.zip · backup.db</a:t>
-                      </a:r>
-                    </a:p>
-                  </a:txBody>
-                  <a:tcPr marL="54864" marR="54864" marT="27432" marB="27432">
-                    <a:solidFill>
-                      <a:srgbClr val="FFFFFF"/>
-                    </a:solidFill>
-                  </a:tcPr>
-                </a:tc>
-                <a:tc>
-                  <a:txBody>
-                    <a:bodyPr wrap="square"/>
-                    <a:lstStyle/>
-                    <a:p>
-                      <a:r>
-                        <a:rPr sz="1100" b="0">
-                          <a:solidFill>
-                            <a:srgbClr val="2B221C"/>
-                          </a:solidFill>
-                          <a:latin typeface="Malgun Gothic"/>
-                        </a:rPr>
-                        <a:t>매출 · CSV · 백업</a:t>
-                      </a:r>
-                    </a:p>
-                  </a:txBody>
-                  <a:tcPr marL="54864" marR="54864" marT="27432" marB="27432">
-                    <a:solidFill>
-                      <a:srgbClr val="FFFFFF"/>
                     </a:solidFill>
                   </a:tcPr>
                 </a:tc>
@@ -5032,7 +5032,7 @@
                 </a:solidFill>
                 <a:latin typeface="Malgun Gothic"/>
               </a:rPr>
-              <a:t>•  현금은 cashGiven 을 함께 보내면 거스름돈 안내가 생긴다 (낸 돈 &lt; 낼 돈이면 거부)</a:t>
+              <a:t>•  현금은 cashGiven 을 함께 보내면 거스름돈 안내가 생긴다 (낸 돈 &lt; 낼 돈이면 거부). 거스름돈은 현금으로 주지 않고 쿠폰에 충전</a:t>
             </a:r>
           </a:p>
           <a:p>
@@ -5080,7 +5080,7 @@
                 </a:solidFill>
                 <a:latin typeface="Malgun Gothic"/>
               </a:rPr>
-              <a:t>•  등록/충전은 한 번에 30,000원까지. 20,000 이상 1잔, 30,000 이면 2잔 (충전 금액 기준, 누적 아님). 정정은 100만원까지</a:t>
+              <a:t>•  등록/충전은 한 번에 30,000원까지. 20,000 이상 1잔, 30,000 이면 2잔 (충전 금액 기준, 누적 아님). 거스름돈 충전도 거스름돈 금액만 기준 (잔액과 합산 안 함). 정정은 100만원까지</a:t>
             </a:r>
           </a:p>
           <a:p>
@@ -5176,7 +5176,7 @@
                 </a:solidFill>
                 <a:latin typeface="Malgun Gothic"/>
               </a:rPr>
-              <a:t>•  늘어남: 거스름돈 흡수 → 넘는 만큼 현금/이체/쿠폰에서 빼기. 줄어듦: 낸 현금 있으면 거스름돈 증가, 없으면 현금/이체/쿠폰으로 돌려주기</a:t>
+              <a:t>•  늘어남: 거스름돈 흡수 → 넘는 만큼 현금/이체/쿠폰에서 빼기. 줄어듦: 낸 현금 있으면 거스름돈 증가(→ 쿠폰), 없으면 현금/이체/쿠폰으로 돌려주기</a:t>
             </a:r>
           </a:p>
           <a:p>
@@ -5208,7 +5208,7 @@
                 </a:solidFill>
                 <a:latin typeface="Malgun Gothic"/>
               </a:rPr>
-              <a:t>•  한 줄 99잔, 한 주문 50줄, 이름 20자, 메뉴 30자, 선택지 10자, 메모 200자, 가격 100원 단위 10만 이하, 층 1~99</a:t>
+              <a:t>•  한 줄 99잔, 한 주문 50줄, 이름 20자, 메뉴 30자, 선택지 10자, 메모 200자, 가격 100원 단위 10만 이하</a:t>
             </a:r>
           </a:p>
         </p:txBody>
@@ -13297,25 +13297,6 @@
                 </a:solidFill>
                 <a:latin typeface="Consolas"/>
               </a:rPr>
-              <a:t>├─ place/     PlaceController(공개) · PlaceAdminController · PlaceRepository</a:t>
-            </a:r>
-          </a:p>
-          <a:p>
-            <a:pPr algn="l">
-              <a:lnSpc>
-                <a:spcPct val="100000"/>
-              </a:lnSpc>
-              <a:spcAft>
-                <a:spcPts val="0"/>
-              </a:spcAft>
-            </a:pPr>
-            <a:r>
-              <a:rPr sz="1050" b="0">
-                <a:solidFill>
-                  <a:srgbClr val="F1E9DD"/>
-                </a:solidFill>
-                <a:latin typeface="Consolas"/>
-              </a:rPr>
               <a:t>├─ coupon/    CouponController · CouponService · CouponRepository</a:t>
             </a:r>
           </a:p>
@@ -13867,7 +13848,7 @@
                           </a:solidFill>
                           <a:latin typeface="Malgun Gothic"/>
                         </a:rPr>
-                        <a:t>주문 생성(가격은 서버가 메뉴표에서), 멱등(clientRequestId), 쿠폰 적용, 수정(환불→재차감, 거스름돈 흡수), 정산(settle), 잔돈 쿠폰 충전, 완료(거스름돈 확정), 되돌리기, 취소(환불 수단 기록)</a:t>
+                        <a:t>주문 생성(가격은 서버가 메뉴표에서), 멱등(clientRequestId), 쿠폰 적용, 수정(환불→재차감, 거스름돈 흡수), 정산(settle), 거스름돈 쿠폰 충전(쿠폰 주문은 자동, 새 쿠폰 만들며 넣기), 완료(거스름돈 남으면 거부), 되돌리기, 취소(환불 수단 기록)</a:t>
                       </a:r>
                     </a:p>
                   </a:txBody>
@@ -13913,7 +13894,7 @@
                           </a:solidFill>
                           <a:latin typeface="Malgun Gothic"/>
                         </a:rPr>
-                        <a:t>조회(동명이인 후보), 등록/충전(ChargePolicy: 30,000 상한, 20,000→1잔·30,000→2잔), 번호/이름 변경, 정정, 삭제 가드, 주문 차감/환불/잔돈 충전, 한 달 이력</a:t>
+                        <a:t>조회(동명이인 후보), 등록/충전(ChargePolicy: 30,000 상한, 20,000→1잔·30,000→2잔), 번호/이름 변경, 정정, 삭제 가드, 주문 차감/환불/거스름돈 충전(무료잔은 거스름돈 금액 기준), 잔액 0 쿠폰 만들기, 한 달 이력</a:t>
                       </a:r>
                     </a:p>
                   </a:txBody>
@@ -14005,7 +13986,7 @@
                           </a:solidFill>
                           <a:latin typeface="Malgun Gothic"/>
                         </a:rPr>
-                        <a:t>휴대폰 11자리, 이름 20/메뉴 30/선택지 10/메모 200자, 가격 100원 단위·10만 이하, 잔액 100만, 수량 99, 줄 50, 층 1~99</a:t>
+                        <a:t>휴대폰 11자리, 이름 20/메뉴 30/선택지 10/메모 200자, 가격 100원 단위·10만 이하, 잔액 100만, 수량 99, 줄 50</a:t>
                       </a:r>
                     </a:p>
                   </a:txBody>
@@ -14720,7 +14701,7 @@
                 </a:solidFill>
                 <a:latin typeface="Consolas"/>
               </a:rPr>
-              <a:t>│  │                       menu→cart→receive→place→payment</a:t>
+              <a:t>│  │                       menu→cart→payment</a:t>
             </a:r>
           </a:p>
           <a:p>
@@ -14758,7 +14739,7 @@
                 </a:solidFill>
                 <a:latin typeface="Consolas"/>
               </a:rPr>
-              <a:t>│  ├─ MenuStep · CartStep · ChoiceSteps(받기/장소/결제)</a:t>
+              <a:t>│  ├─ MenuStep · CartStep · ChoiceSteps(결제 수단)</a:t>
             </a:r>
           </a:p>
           <a:p>
@@ -14891,7 +14872,7 @@
                 </a:solidFill>
                 <a:latin typeface="Consolas"/>
               </a:rPr>
-              <a:t>      · CategoryAdmin · PlaceAdmin</a:t>
+              <a:t>      · CategoryAdmin</a:t>
             </a:r>
           </a:p>
         </p:txBody>
@@ -15523,7 +15504,7 @@
                           </a:solidFill>
                           <a:latin typeface="Malgun Gothic"/>
                         </a:rPr>
-                        <a:t>1층만 운영</a:t>
+                        <a:t>배달을 없애 쓰지 않음. 옛 주문의 place_id 때문에 테이블만 남김</a:t>
                       </a:r>
                     </a:p>
                   </a:txBody>
@@ -15659,7 +15640,7 @@
                           </a:solidFill>
                           <a:latin typeface="Malgun Gothic"/>
                         </a:rPr>
-                        <a:t>잔돈 충전은 CHARGE + order_id</a:t>
+                        <a:t>거스름돈 충전은 CHARGE + order_id, free_delta 는 거스름돈 금액 기준</a:t>
                       </a:r>
                     </a:p>
                   </a:txBody>
@@ -15773,7 +15754,7 @@
                           </a:solidFill>
                           <a:latin typeface="Malgun Gothic"/>
                         </a:rPr>
-                        <a:t>order_date, order_no, customer_name, receive_type, place_*, total_amount, staff_free_amount, pay_method, remainder_method, coupon_id, coupon_amount, free_amount, free_item_name, cash_amount, transfer_amount, settled_cash, settled_transfer, cash_given, change_credited, change_paid, refund_cash, refund_transfer, status, memo, edited_at, edit_note, client_request_id</a:t>
+                        <a:t>order_date, order_no, customer_name, receive_type(늘 STORE), place_*(옛 배달), total_amount, staff_free_amount, pay_method, remainder_method, coupon_id, coupon_amount, free_amount, free_item_name, cash_amount, transfer_amount, settled_cash, settled_transfer, cash_given, change_credited, change_paid, refund_cash, refund_transfer, status, memo, edited_at, edit_note, client_request_id</a:t>
                       </a:r>
                     </a:p>
                   </a:txBody>
